--- a/docs/преза к отчёту.pptx
+++ b/docs/преза к отчёту.pptx
@@ -5,9 +5,10 @@
     <p:sldMasterId id="2147483648" r:id="rId1"/>
   </p:sldMasterIdLst>
   <p:sldIdLst>
-    <p:sldId id="256" r:id="rId2"/>
-    <p:sldId id="257" r:id="rId3"/>
-    <p:sldId id="258" r:id="rId4"/>
+    <p:sldId id="259" r:id="rId2"/>
+    <p:sldId id="256" r:id="rId3"/>
+    <p:sldId id="257" r:id="rId4"/>
+    <p:sldId id="258" r:id="rId5"/>
   </p:sldIdLst>
   <p:sldSz cx="12192000" cy="6858000"/>
   <p:notesSz cx="6858000" cy="9144000"/>
@@ -106,6 +107,11 @@
       </a:defRPr>
     </a:lvl9pPr>
   </p:defaultTextStyle>
+  <p:extLst>
+    <p:ext uri="{EFAFB233-063F-42B5-8137-9DF3F51BA10A}">
+      <p15:sldGuideLst xmlns:p15="http://schemas.microsoft.com/office/powerpoint/2012/main"/>
+    </p:ext>
+  </p:extLst>
 </p:presentation>
 </file>
 
@@ -256,7 +262,7 @@
           <a:p>
             <a:fld id="{62BA7444-8A15-4E9D-906B-EB399EAD8DEE}" type="datetimeFigureOut">
               <a:rPr lang="ru-RU" smtClean="0"/>
-              <a:t>12.12.2025</a:t>
+              <a:t>14.12.2025</a:t>
             </a:fld>
             <a:endParaRPr lang="ru-RU"/>
           </a:p>
@@ -454,7 +460,7 @@
           <a:p>
             <a:fld id="{62BA7444-8A15-4E9D-906B-EB399EAD8DEE}" type="datetimeFigureOut">
               <a:rPr lang="ru-RU" smtClean="0"/>
-              <a:t>12.12.2025</a:t>
+              <a:t>14.12.2025</a:t>
             </a:fld>
             <a:endParaRPr lang="ru-RU"/>
           </a:p>
@@ -662,7 +668,7 @@
           <a:p>
             <a:fld id="{62BA7444-8A15-4E9D-906B-EB399EAD8DEE}" type="datetimeFigureOut">
               <a:rPr lang="ru-RU" smtClean="0"/>
-              <a:t>12.12.2025</a:t>
+              <a:t>14.12.2025</a:t>
             </a:fld>
             <a:endParaRPr lang="ru-RU"/>
           </a:p>
@@ -860,7 +866,7 @@
           <a:p>
             <a:fld id="{62BA7444-8A15-4E9D-906B-EB399EAD8DEE}" type="datetimeFigureOut">
               <a:rPr lang="ru-RU" smtClean="0"/>
-              <a:t>12.12.2025</a:t>
+              <a:t>14.12.2025</a:t>
             </a:fld>
             <a:endParaRPr lang="ru-RU"/>
           </a:p>
@@ -1135,7 +1141,7 @@
           <a:p>
             <a:fld id="{62BA7444-8A15-4E9D-906B-EB399EAD8DEE}" type="datetimeFigureOut">
               <a:rPr lang="ru-RU" smtClean="0"/>
-              <a:t>12.12.2025</a:t>
+              <a:t>14.12.2025</a:t>
             </a:fld>
             <a:endParaRPr lang="ru-RU"/>
           </a:p>
@@ -1400,7 +1406,7 @@
           <a:p>
             <a:fld id="{62BA7444-8A15-4E9D-906B-EB399EAD8DEE}" type="datetimeFigureOut">
               <a:rPr lang="ru-RU" smtClean="0"/>
-              <a:t>12.12.2025</a:t>
+              <a:t>14.12.2025</a:t>
             </a:fld>
             <a:endParaRPr lang="ru-RU"/>
           </a:p>
@@ -1812,7 +1818,7 @@
           <a:p>
             <a:fld id="{62BA7444-8A15-4E9D-906B-EB399EAD8DEE}" type="datetimeFigureOut">
               <a:rPr lang="ru-RU" smtClean="0"/>
-              <a:t>12.12.2025</a:t>
+              <a:t>14.12.2025</a:t>
             </a:fld>
             <a:endParaRPr lang="ru-RU"/>
           </a:p>
@@ -1953,7 +1959,7 @@
           <a:p>
             <a:fld id="{62BA7444-8A15-4E9D-906B-EB399EAD8DEE}" type="datetimeFigureOut">
               <a:rPr lang="ru-RU" smtClean="0"/>
-              <a:t>12.12.2025</a:t>
+              <a:t>14.12.2025</a:t>
             </a:fld>
             <a:endParaRPr lang="ru-RU"/>
           </a:p>
@@ -2066,7 +2072,7 @@
           <a:p>
             <a:fld id="{62BA7444-8A15-4E9D-906B-EB399EAD8DEE}" type="datetimeFigureOut">
               <a:rPr lang="ru-RU" smtClean="0"/>
-              <a:t>12.12.2025</a:t>
+              <a:t>14.12.2025</a:t>
             </a:fld>
             <a:endParaRPr lang="ru-RU"/>
           </a:p>
@@ -2377,7 +2383,7 @@
           <a:p>
             <a:fld id="{62BA7444-8A15-4E9D-906B-EB399EAD8DEE}" type="datetimeFigureOut">
               <a:rPr lang="ru-RU" smtClean="0"/>
-              <a:t>12.12.2025</a:t>
+              <a:t>14.12.2025</a:t>
             </a:fld>
             <a:endParaRPr lang="ru-RU"/>
           </a:p>
@@ -2665,7 +2671,7 @@
           <a:p>
             <a:fld id="{62BA7444-8A15-4E9D-906B-EB399EAD8DEE}" type="datetimeFigureOut">
               <a:rPr lang="ru-RU" smtClean="0"/>
-              <a:t>12.12.2025</a:t>
+              <a:t>14.12.2025</a:t>
             </a:fld>
             <a:endParaRPr lang="ru-RU"/>
           </a:p>
@@ -2906,7 +2912,7 @@
           <a:p>
             <a:fld id="{62BA7444-8A15-4E9D-906B-EB399EAD8DEE}" type="datetimeFigureOut">
               <a:rPr lang="ru-RU" smtClean="0"/>
-              <a:t>12.12.2025</a:t>
+              <a:t>14.12.2025</a:t>
             </a:fld>
             <a:endParaRPr lang="ru-RU"/>
           </a:p>
@@ -3328,6 +3334,95 @@
           <p:cNvPr id="2" name="Заголовок 1">
             <a:extLst>
               <a:ext uri="{FF2B5EF4-FFF2-40B4-BE49-F238E27FC236}">
+                <a16:creationId xmlns:a16="http://schemas.microsoft.com/office/drawing/2014/main" id="{5078F24E-4287-4D7E-92F7-F8C1723FE215}"/>
+              </a:ext>
+            </a:extLst>
+          </p:cNvPr>
+          <p:cNvSpPr>
+            <a:spLocks noGrp="1"/>
+          </p:cNvSpPr>
+          <p:nvPr>
+            <p:ph type="title"/>
+          </p:nvPr>
+        </p:nvSpPr>
+        <p:spPr/>
+        <p:txBody>
+          <a:bodyPr/>
+          <a:lstStyle/>
+          <a:p>
+            <a:r>
+              <a:rPr lang="ru-RU" dirty="0"/>
+              <a:t>Кувшинов Тимур Пибд-41</a:t>
+            </a:r>
+          </a:p>
+        </p:txBody>
+      </p:sp>
+      <p:sp>
+        <p:nvSpPr>
+          <p:cNvPr id="3" name="Объект 2">
+            <a:extLst>
+              <a:ext uri="{FF2B5EF4-FFF2-40B4-BE49-F238E27FC236}">
+                <a16:creationId xmlns:a16="http://schemas.microsoft.com/office/drawing/2014/main" id="{7B0235A1-40B3-47B7-9B6E-EABD11AC8597}"/>
+              </a:ext>
+            </a:extLst>
+          </p:cNvPr>
+          <p:cNvSpPr>
+            <a:spLocks noGrp="1"/>
+          </p:cNvSpPr>
+          <p:nvPr>
+            <p:ph idx="1"/>
+          </p:nvPr>
+        </p:nvSpPr>
+        <p:spPr/>
+        <p:txBody>
+          <a:bodyPr/>
+          <a:lstStyle/>
+          <a:p>
+            <a:pPr marL="0" indent="0">
+              <a:buNone/>
+            </a:pPr>
+            <a:r>
+              <a:rPr lang="ru-RU" dirty="0"/>
+              <a:t>Разработать мобильное приложение, которое помогает пользователю найти дату изготовления на продукте.</a:t>
+            </a:r>
+          </a:p>
+        </p:txBody>
+      </p:sp>
+    </p:spTree>
+    <p:extLst>
+      <p:ext uri="{BB962C8B-B14F-4D97-AF65-F5344CB8AC3E}">
+        <p14:creationId xmlns:p14="http://schemas.microsoft.com/office/powerpoint/2010/main" val="1313476870"/>
+      </p:ext>
+    </p:extLst>
+  </p:cSld>
+  <p:clrMapOvr>
+    <a:masterClrMapping/>
+  </p:clrMapOvr>
+</p:sld>
+</file>
+
+<file path=ppt/slides/slide2.xml><?xml version="1.0" encoding="utf-8"?>
+<p:sld xmlns:a="http://schemas.openxmlformats.org/drawingml/2006/main" xmlns:r="http://schemas.openxmlformats.org/officeDocument/2006/relationships" xmlns:p="http://schemas.openxmlformats.org/presentationml/2006/main">
+  <p:cSld>
+    <p:spTree>
+      <p:nvGrpSpPr>
+        <p:cNvPr id="1" name=""/>
+        <p:cNvGrpSpPr/>
+        <p:nvPr/>
+      </p:nvGrpSpPr>
+      <p:grpSpPr>
+        <a:xfrm>
+          <a:off x="0" y="0"/>
+          <a:ext cx="0" cy="0"/>
+          <a:chOff x="0" y="0"/>
+          <a:chExt cx="0" cy="0"/>
+        </a:xfrm>
+      </p:grpSpPr>
+      <p:sp>
+        <p:nvSpPr>
+          <p:cNvPr id="2" name="Заголовок 1">
+            <a:extLst>
+              <a:ext uri="{FF2B5EF4-FFF2-40B4-BE49-F238E27FC236}">
                 <a16:creationId xmlns:a16="http://schemas.microsoft.com/office/drawing/2014/main" id="{0E521CF2-360D-4094-B87B-8F7844F61C61}"/>
               </a:ext>
             </a:extLst>
@@ -3569,7 +3664,7 @@
 </p:sld>
 </file>
 
-<file path=ppt/slides/slide2.xml><?xml version="1.0" encoding="utf-8"?>
+<file path=ppt/slides/slide3.xml><?xml version="1.0" encoding="utf-8"?>
 <p:sld xmlns:a="http://schemas.openxmlformats.org/drawingml/2006/main" xmlns:r="http://schemas.openxmlformats.org/officeDocument/2006/relationships" xmlns:p="http://schemas.openxmlformats.org/presentationml/2006/main">
   <p:cSld>
     <p:spTree>
@@ -3663,7 +3758,7 @@
 </p:sld>
 </file>
 
-<file path=ppt/slides/slide3.xml><?xml version="1.0" encoding="utf-8"?>
+<file path=ppt/slides/slide4.xml><?xml version="1.0" encoding="utf-8"?>
 <p:sld xmlns:a="http://schemas.openxmlformats.org/drawingml/2006/main" xmlns:r="http://schemas.openxmlformats.org/officeDocument/2006/relationships" xmlns:p="http://schemas.openxmlformats.org/presentationml/2006/main">
   <p:cSld>
     <p:spTree>

--- a/docs/преза к отчёту.pptx
+++ b/docs/преза к отчёту.pptx
@@ -3388,77 +3388,12 @@
           </a:p>
         </p:txBody>
       </p:sp>
-    </p:spTree>
-    <p:extLst>
-      <p:ext uri="{BB962C8B-B14F-4D97-AF65-F5344CB8AC3E}">
-        <p14:creationId xmlns:p14="http://schemas.microsoft.com/office/powerpoint/2010/main" val="1313476870"/>
-      </p:ext>
-    </p:extLst>
-  </p:cSld>
-  <p:clrMapOvr>
-    <a:masterClrMapping/>
-  </p:clrMapOvr>
-</p:sld>
-</file>
-
-<file path=ppt/slides/slide2.xml><?xml version="1.0" encoding="utf-8"?>
-<p:sld xmlns:a="http://schemas.openxmlformats.org/drawingml/2006/main" xmlns:r="http://schemas.openxmlformats.org/officeDocument/2006/relationships" xmlns:p="http://schemas.openxmlformats.org/presentationml/2006/main">
-  <p:cSld>
-    <p:spTree>
-      <p:nvGrpSpPr>
-        <p:cNvPr id="1" name=""/>
-        <p:cNvGrpSpPr/>
-        <p:nvPr/>
-      </p:nvGrpSpPr>
-      <p:grpSpPr>
-        <a:xfrm>
-          <a:off x="0" y="0"/>
-          <a:ext cx="0" cy="0"/>
-          <a:chOff x="0" y="0"/>
-          <a:chExt cx="0" cy="0"/>
-        </a:xfrm>
-      </p:grpSpPr>
-      <p:sp>
-        <p:nvSpPr>
-          <p:cNvPr id="2" name="Заголовок 1">
-            <a:extLst>
-              <a:ext uri="{FF2B5EF4-FFF2-40B4-BE49-F238E27FC236}">
-                <a16:creationId xmlns:a16="http://schemas.microsoft.com/office/drawing/2014/main" id="{0E521CF2-360D-4094-B87B-8F7844F61C61}"/>
-              </a:ext>
-            </a:extLst>
-          </p:cNvPr>
-          <p:cNvSpPr>
-            <a:spLocks noGrp="1"/>
-          </p:cNvSpPr>
-          <p:nvPr>
-            <p:ph type="ctrTitle"/>
-          </p:nvPr>
-        </p:nvSpPr>
-        <p:spPr>
-          <a:xfrm>
-            <a:off x="1524000" y="1122363"/>
-            <a:ext cx="9144000" cy="652649"/>
-          </a:xfrm>
-        </p:spPr>
-        <p:txBody>
-          <a:bodyPr>
-            <a:normAutofit fontScale="90000"/>
-          </a:bodyPr>
-          <a:lstStyle/>
-          <a:p>
-            <a:r>
-              <a:rPr lang="ru-RU" dirty="0"/>
-              <a:t>Что будет видеть пользователь</a:t>
-            </a:r>
-          </a:p>
-        </p:txBody>
-      </p:sp>
       <p:pic>
         <p:nvPicPr>
-          <p:cNvPr id="5" name="Рисунок 4">
-            <a:extLst>
-              <a:ext uri="{FF2B5EF4-FFF2-40B4-BE49-F238E27FC236}">
-                <a16:creationId xmlns:a16="http://schemas.microsoft.com/office/drawing/2014/main" id="{CAFA7C5A-7D33-4607-9F8C-3BBEA12B5BA8}"/>
+          <p:cNvPr id="4" name="Рисунок 3">
+            <a:extLst>
+              <a:ext uri="{FF2B5EF4-FFF2-40B4-BE49-F238E27FC236}">
+                <a16:creationId xmlns:a16="http://schemas.microsoft.com/office/drawing/2014/main" id="{7F59D392-276A-45A6-9767-5EDBBE6507EC}"/>
               </a:ext>
             </a:extLst>
           </p:cNvPr>
@@ -3468,37 +3403,7 @@
           <p:nvPr/>
         </p:nvPicPr>
         <p:blipFill>
-          <a:blip r:embed="rId2"/>
-          <a:stretch>
-            <a:fillRect/>
-          </a:stretch>
-        </p:blipFill>
-        <p:spPr>
-          <a:xfrm>
-            <a:off x="4760260" y="1775012"/>
-            <a:ext cx="2312893" cy="4887744"/>
-          </a:xfrm>
-          <a:prstGeom prst="rect">
-            <a:avLst/>
-          </a:prstGeom>
-        </p:spPr>
-      </p:pic>
-      <p:pic>
-        <p:nvPicPr>
-          <p:cNvPr id="7" name="Рисунок 6">
-            <a:extLst>
-              <a:ext uri="{FF2B5EF4-FFF2-40B4-BE49-F238E27FC236}">
-                <a16:creationId xmlns:a16="http://schemas.microsoft.com/office/drawing/2014/main" id="{F01273C6-2444-4468-B529-C102035AE492}"/>
-              </a:ext>
-            </a:extLst>
-          </p:cNvPr>
-          <p:cNvPicPr>
-            <a:picLocks noChangeAspect="1"/>
-          </p:cNvPicPr>
-          <p:nvPr/>
-        </p:nvPicPr>
-        <p:blipFill>
-          <a:blip r:embed="rId3">
+          <a:blip r:embed="rId2">
             <a:extLst>
               <a:ext uri="{28A0092B-C50C-407E-A947-70E740481C1C}">
                 <a14:useLocalDpi xmlns:a14="http://schemas.microsoft.com/office/drawing/2010/main" val="0"/>
@@ -3511,109 +3416,7 @@
         </p:blipFill>
         <p:spPr>
           <a:xfrm>
-            <a:off x="3807594" y="1371600"/>
-            <a:ext cx="3893088" cy="5901977"/>
-          </a:xfrm>
-          <a:prstGeom prst="rect">
-            <a:avLst/>
-          </a:prstGeom>
-        </p:spPr>
-      </p:pic>
-      <p:pic>
-        <p:nvPicPr>
-          <p:cNvPr id="9" name="Рисунок 8">
-            <a:extLst>
-              <a:ext uri="{FF2B5EF4-FFF2-40B4-BE49-F238E27FC236}">
-                <a16:creationId xmlns:a16="http://schemas.microsoft.com/office/drawing/2014/main" id="{83F8B0D5-2207-414E-AC6E-EFAF8D6E8153}"/>
-              </a:ext>
-            </a:extLst>
-          </p:cNvPr>
-          <p:cNvPicPr>
-            <a:picLocks noChangeAspect="1"/>
-          </p:cNvPicPr>
-          <p:nvPr/>
-        </p:nvPicPr>
-        <p:blipFill>
-          <a:blip r:embed="rId4"/>
-          <a:stretch>
-            <a:fillRect/>
-          </a:stretch>
-        </p:blipFill>
-        <p:spPr>
-          <a:xfrm>
-            <a:off x="7700682" y="1775012"/>
-            <a:ext cx="2214283" cy="4794513"/>
-          </a:xfrm>
-          <a:prstGeom prst="rect">
-            <a:avLst/>
-          </a:prstGeom>
-        </p:spPr>
-      </p:pic>
-      <p:pic>
-        <p:nvPicPr>
-          <p:cNvPr id="11" name="Рисунок 10">
-            <a:extLst>
-              <a:ext uri="{FF2B5EF4-FFF2-40B4-BE49-F238E27FC236}">
-                <a16:creationId xmlns:a16="http://schemas.microsoft.com/office/drawing/2014/main" id="{23BC9978-B614-4FAF-AB6E-D152CAB3FE2E}"/>
-              </a:ext>
-            </a:extLst>
-          </p:cNvPr>
-          <p:cNvPicPr>
-            <a:picLocks noChangeAspect="1"/>
-          </p:cNvPicPr>
-          <p:nvPr/>
-        </p:nvPicPr>
-        <p:blipFill>
-          <a:blip r:embed="rId3">
-            <a:extLst>
-              <a:ext uri="{28A0092B-C50C-407E-A947-70E740481C1C}">
-                <a14:useLocalDpi xmlns:a14="http://schemas.microsoft.com/office/drawing/2010/main" val="0"/>
-              </a:ext>
-            </a:extLst>
-          </a:blip>
-          <a:stretch>
-            <a:fillRect/>
-          </a:stretch>
-        </p:blipFill>
-        <p:spPr>
-          <a:xfrm>
-            <a:off x="6706803" y="1350688"/>
-            <a:ext cx="3893089" cy="5901979"/>
-          </a:xfrm>
-          <a:prstGeom prst="rect">
-            <a:avLst/>
-          </a:prstGeom>
-        </p:spPr>
-      </p:pic>
-      <p:pic>
-        <p:nvPicPr>
-          <p:cNvPr id="14" name="Рисунок 13">
-            <a:extLst>
-              <a:ext uri="{FF2B5EF4-FFF2-40B4-BE49-F238E27FC236}">
-                <a16:creationId xmlns:a16="http://schemas.microsoft.com/office/drawing/2014/main" id="{F7E571D7-F9F7-4221-9B9C-CF131C86A8D2}"/>
-              </a:ext>
-            </a:extLst>
-          </p:cNvPr>
-          <p:cNvPicPr>
-            <a:picLocks noChangeAspect="1"/>
-          </p:cNvPicPr>
-          <p:nvPr/>
-        </p:nvPicPr>
-        <p:blipFill>
-          <a:blip r:embed="rId5">
-            <a:extLst>
-              <a:ext uri="{28A0092B-C50C-407E-A947-70E740481C1C}">
-                <a14:useLocalDpi xmlns:a14="http://schemas.microsoft.com/office/drawing/2010/main" val="0"/>
-              </a:ext>
-            </a:extLst>
-          </a:blip>
-          <a:stretch>
-            <a:fillRect/>
-          </a:stretch>
-        </p:blipFill>
-        <p:spPr>
-          <a:xfrm>
-            <a:off x="383077" y="3061998"/>
+            <a:off x="5179987" y="3304045"/>
             <a:ext cx="3638878" cy="2424402"/>
           </a:xfrm>
           <a:prstGeom prst="rect">
@@ -3649,6 +3452,203 @@
               <a:srgbClr val="FFFFFF"/>
             </a:contourClr>
           </a:sp3d>
+        </p:spPr>
+      </p:pic>
+    </p:spTree>
+    <p:extLst>
+      <p:ext uri="{BB962C8B-B14F-4D97-AF65-F5344CB8AC3E}">
+        <p14:creationId xmlns:p14="http://schemas.microsoft.com/office/powerpoint/2010/main" val="1313476870"/>
+      </p:ext>
+    </p:extLst>
+  </p:cSld>
+  <p:clrMapOvr>
+    <a:masterClrMapping/>
+  </p:clrMapOvr>
+</p:sld>
+</file>
+
+<file path=ppt/slides/slide2.xml><?xml version="1.0" encoding="utf-8"?>
+<p:sld xmlns:a="http://schemas.openxmlformats.org/drawingml/2006/main" xmlns:r="http://schemas.openxmlformats.org/officeDocument/2006/relationships" xmlns:p="http://schemas.openxmlformats.org/presentationml/2006/main">
+  <p:cSld>
+    <p:spTree>
+      <p:nvGrpSpPr>
+        <p:cNvPr id="1" name=""/>
+        <p:cNvGrpSpPr/>
+        <p:nvPr/>
+      </p:nvGrpSpPr>
+      <p:grpSpPr>
+        <a:xfrm>
+          <a:off x="0" y="0"/>
+          <a:ext cx="0" cy="0"/>
+          <a:chOff x="0" y="0"/>
+          <a:chExt cx="0" cy="0"/>
+        </a:xfrm>
+      </p:grpSpPr>
+      <p:sp>
+        <p:nvSpPr>
+          <p:cNvPr id="2" name="Заголовок 1">
+            <a:extLst>
+              <a:ext uri="{FF2B5EF4-FFF2-40B4-BE49-F238E27FC236}">
+                <a16:creationId xmlns:a16="http://schemas.microsoft.com/office/drawing/2014/main" id="{0E521CF2-360D-4094-B87B-8F7844F61C61}"/>
+              </a:ext>
+            </a:extLst>
+          </p:cNvPr>
+          <p:cNvSpPr>
+            <a:spLocks noGrp="1"/>
+          </p:cNvSpPr>
+          <p:nvPr>
+            <p:ph type="ctrTitle"/>
+          </p:nvPr>
+        </p:nvSpPr>
+        <p:spPr>
+          <a:xfrm>
+            <a:off x="1524000" y="1122363"/>
+            <a:ext cx="9144000" cy="652649"/>
+          </a:xfrm>
+        </p:spPr>
+        <p:txBody>
+          <a:bodyPr>
+            <a:normAutofit fontScale="90000"/>
+          </a:bodyPr>
+          <a:lstStyle/>
+          <a:p>
+            <a:r>
+              <a:rPr lang="ru-RU" dirty="0"/>
+              <a:t>Что будет видеть пользователь</a:t>
+            </a:r>
+          </a:p>
+        </p:txBody>
+      </p:sp>
+      <p:pic>
+        <p:nvPicPr>
+          <p:cNvPr id="5" name="Рисунок 4">
+            <a:extLst>
+              <a:ext uri="{FF2B5EF4-FFF2-40B4-BE49-F238E27FC236}">
+                <a16:creationId xmlns:a16="http://schemas.microsoft.com/office/drawing/2014/main" id="{CAFA7C5A-7D33-4607-9F8C-3BBEA12B5BA8}"/>
+              </a:ext>
+            </a:extLst>
+          </p:cNvPr>
+          <p:cNvPicPr>
+            <a:picLocks noChangeAspect="1"/>
+          </p:cNvPicPr>
+          <p:nvPr/>
+        </p:nvPicPr>
+        <p:blipFill>
+          <a:blip r:embed="rId2"/>
+          <a:stretch>
+            <a:fillRect/>
+          </a:stretch>
+        </p:blipFill>
+        <p:spPr>
+          <a:xfrm>
+            <a:off x="4760260" y="1775012"/>
+            <a:ext cx="2312893" cy="4887744"/>
+          </a:xfrm>
+          <a:prstGeom prst="rect">
+            <a:avLst/>
+          </a:prstGeom>
+        </p:spPr>
+      </p:pic>
+      <p:pic>
+        <p:nvPicPr>
+          <p:cNvPr id="7" name="Рисунок 6">
+            <a:extLst>
+              <a:ext uri="{FF2B5EF4-FFF2-40B4-BE49-F238E27FC236}">
+                <a16:creationId xmlns:a16="http://schemas.microsoft.com/office/drawing/2014/main" id="{F01273C6-2444-4468-B529-C102035AE492}"/>
+              </a:ext>
+            </a:extLst>
+          </p:cNvPr>
+          <p:cNvPicPr>
+            <a:picLocks noChangeAspect="1"/>
+          </p:cNvPicPr>
+          <p:nvPr/>
+        </p:nvPicPr>
+        <p:blipFill>
+          <a:blip r:embed="rId3">
+            <a:extLst>
+              <a:ext uri="{28A0092B-C50C-407E-A947-70E740481C1C}">
+                <a14:useLocalDpi xmlns:a14="http://schemas.microsoft.com/office/drawing/2010/main" val="0"/>
+              </a:ext>
+            </a:extLst>
+          </a:blip>
+          <a:stretch>
+            <a:fillRect/>
+          </a:stretch>
+        </p:blipFill>
+        <p:spPr>
+          <a:xfrm>
+            <a:off x="3807594" y="1371600"/>
+            <a:ext cx="3893088" cy="5901977"/>
+          </a:xfrm>
+          <a:prstGeom prst="rect">
+            <a:avLst/>
+          </a:prstGeom>
+        </p:spPr>
+      </p:pic>
+      <p:pic>
+        <p:nvPicPr>
+          <p:cNvPr id="9" name="Рисунок 8">
+            <a:extLst>
+              <a:ext uri="{FF2B5EF4-FFF2-40B4-BE49-F238E27FC236}">
+                <a16:creationId xmlns:a16="http://schemas.microsoft.com/office/drawing/2014/main" id="{83F8B0D5-2207-414E-AC6E-EFAF8D6E8153}"/>
+              </a:ext>
+            </a:extLst>
+          </p:cNvPr>
+          <p:cNvPicPr>
+            <a:picLocks noChangeAspect="1"/>
+          </p:cNvPicPr>
+          <p:nvPr/>
+        </p:nvPicPr>
+        <p:blipFill>
+          <a:blip r:embed="rId4"/>
+          <a:stretch>
+            <a:fillRect/>
+          </a:stretch>
+        </p:blipFill>
+        <p:spPr>
+          <a:xfrm>
+            <a:off x="7700682" y="1775012"/>
+            <a:ext cx="2214283" cy="4794513"/>
+          </a:xfrm>
+          <a:prstGeom prst="rect">
+            <a:avLst/>
+          </a:prstGeom>
+        </p:spPr>
+      </p:pic>
+      <p:pic>
+        <p:nvPicPr>
+          <p:cNvPr id="11" name="Рисунок 10">
+            <a:extLst>
+              <a:ext uri="{FF2B5EF4-FFF2-40B4-BE49-F238E27FC236}">
+                <a16:creationId xmlns:a16="http://schemas.microsoft.com/office/drawing/2014/main" id="{23BC9978-B614-4FAF-AB6E-D152CAB3FE2E}"/>
+              </a:ext>
+            </a:extLst>
+          </p:cNvPr>
+          <p:cNvPicPr>
+            <a:picLocks noChangeAspect="1"/>
+          </p:cNvPicPr>
+          <p:nvPr/>
+        </p:nvPicPr>
+        <p:blipFill>
+          <a:blip r:embed="rId3">
+            <a:extLst>
+              <a:ext uri="{28A0092B-C50C-407E-A947-70E740481C1C}">
+                <a14:useLocalDpi xmlns:a14="http://schemas.microsoft.com/office/drawing/2010/main" val="0"/>
+              </a:ext>
+            </a:extLst>
+          </a:blip>
+          <a:stretch>
+            <a:fillRect/>
+          </a:stretch>
+        </p:blipFill>
+        <p:spPr>
+          <a:xfrm>
+            <a:off x="6706803" y="1350688"/>
+            <a:ext cx="3893089" cy="5901979"/>
+          </a:xfrm>
+          <a:prstGeom prst="rect">
+            <a:avLst/>
+          </a:prstGeom>
         </p:spPr>
       </p:pic>
     </p:spTree>
